--- a/slides-core-didactic-principles-pptx.pptx
+++ b/slides-core-didactic-principles-pptx.pptx
@@ -10465,7 +10465,7 @@
             <a:pPr algn="ctr"/>
             <a:r>
               <a:rPr lang="en-US"/>
-              <a:t>07/10/2026</a:t>
+              <a:t>12/10/2026</a:t>
             </a:r>
             <a:endParaRPr dirty="0" lang="en-US"/>
           </a:p>
@@ -10692,7 +10692,7 @@
             <a:pPr algn="ctr"/>
             <a:r>
               <a:rPr lang="en-US"/>
-              <a:t>07/10/2026</a:t>
+              <a:t>12/10/2026</a:t>
             </a:r>
             <a:endParaRPr dirty="0" lang="en-US"/>
           </a:p>
@@ -10876,7 +10876,7 @@
             <a:pPr algn="ctr"/>
             <a:r>
               <a:rPr lang="en-US"/>
-              <a:t>07/10/2026</a:t>
+              <a:t>12/10/2026</a:t>
             </a:r>
             <a:endParaRPr dirty="0" lang="en-US"/>
           </a:p>
@@ -11060,7 +11060,7 @@
             <a:pPr algn="ctr"/>
             <a:r>
               <a:rPr lang="en-US"/>
-              <a:t>07/10/2026</a:t>
+              <a:t>12/10/2026</a:t>
             </a:r>
             <a:endParaRPr dirty="0" lang="en-US"/>
           </a:p>
@@ -11226,7 +11226,7 @@
             <a:pPr algn="ctr"/>
             <a:r>
               <a:rPr lang="en-US"/>
-              <a:t>07/10/2026</a:t>
+              <a:t>12/10/2026</a:t>
             </a:r>
             <a:endParaRPr dirty="0" lang="en-US"/>
           </a:p>
@@ -11444,7 +11444,7 @@
             <a:pPr algn="ctr"/>
             <a:r>
               <a:rPr lang="en-US"/>
-              <a:t>07/10/2026</a:t>
+              <a:t>12/10/2026</a:t>
             </a:r>
             <a:endParaRPr dirty="0" lang="en-US"/>
           </a:p>
@@ -11649,7 +11649,7 @@
             <a:pPr algn="ctr"/>
             <a:r>
               <a:rPr lang="en-US"/>
-              <a:t>07/10/2026</a:t>
+              <a:t>12/10/2026</a:t>
             </a:r>
             <a:endParaRPr dirty="0" lang="en-US"/>
           </a:p>
@@ -11854,7 +11854,7 @@
             <a:pPr algn="ctr"/>
             <a:r>
               <a:rPr lang="en-US"/>
-              <a:t>07/10/2026</a:t>
+              <a:t>12/10/2026</a:t>
             </a:r>
             <a:endParaRPr dirty="0" lang="en-US"/>
           </a:p>
@@ -12057,7 +12057,7 @@
             <a:pPr algn="ctr"/>
             <a:r>
               <a:rPr lang="en-US"/>
-              <a:t>07/10/2026</a:t>
+              <a:t>12/10/2026</a:t>
             </a:r>
             <a:endParaRPr dirty="0" lang="en-US"/>
           </a:p>
@@ -12270,7 +12270,7 @@
             <a:pPr algn="ctr"/>
             <a:r>
               <a:rPr lang="en-US"/>
-              <a:t>07/10/2026</a:t>
+              <a:t>12/10/2026</a:t>
             </a:r>
             <a:endParaRPr dirty="0" lang="en-US"/>
           </a:p>
@@ -12763,7 +12763,7 @@
             <a:pPr algn="ctr"/>
             <a:r>
               <a:rPr lang="en-US"/>
-              <a:t>07/10/2026</a:t>
+              <a:t>12/10/2026</a:t>
             </a:r>
             <a:endParaRPr dirty="0" lang="en-US"/>
           </a:p>
@@ -13182,7 +13182,7 @@
             <a:pPr algn="ctr"/>
             <a:r>
               <a:rPr lang="en-US"/>
-              <a:t>07/10/2026</a:t>
+              <a:t>12/10/2026</a:t>
             </a:r>
             <a:endParaRPr dirty="0" lang="en-US"/>
           </a:p>
@@ -13402,7 +13402,7 @@
             <a:pPr algn="ctr"/>
             <a:r>
               <a:rPr lang="en-US"/>
-              <a:t>07/10/2026</a:t>
+              <a:t>12/10/2026</a:t>
             </a:r>
             <a:endParaRPr dirty="0" lang="en-US"/>
           </a:p>
@@ -13625,7 +13625,7 @@
             <a:pPr algn="ctr"/>
             <a:r>
               <a:rPr lang="en-US"/>
-              <a:t>07/10/2026</a:t>
+              <a:t>12/10/2026</a:t>
             </a:r>
             <a:endParaRPr dirty="0" lang="en-US"/>
           </a:p>
@@ -13802,7 +13802,7 @@
             <a:pPr algn="ctr"/>
             <a:r>
               <a:rPr lang="en-US"/>
-              <a:t>07/10/2026</a:t>
+              <a:t>12/10/2026</a:t>
             </a:r>
             <a:endParaRPr dirty="0" lang="en-US"/>
           </a:p>
@@ -14012,7 +14012,7 @@
             <a:pPr algn="ctr"/>
             <a:r>
               <a:rPr lang="en-US"/>
-              <a:t>07/10/2026</a:t>
+              <a:t>12/10/2026</a:t>
             </a:r>
             <a:endParaRPr dirty="0" lang="en-US"/>
           </a:p>
@@ -14229,7 +14229,7 @@
             <a:pPr algn="ctr"/>
             <a:r>
               <a:rPr lang="en-US"/>
-              <a:t>07/10/2026</a:t>
+              <a:t>12/10/2026</a:t>
             </a:r>
             <a:endParaRPr dirty="0" lang="en-US"/>
           </a:p>
@@ -14660,7 +14660,7 @@
             <a:pPr algn="ctr"/>
             <a:r>
               <a:rPr lang="en-US"/>
-              <a:t>07/10/2026</a:t>
+              <a:t>12/10/2026</a:t>
             </a:r>
             <a:endParaRPr dirty="0" lang="en-US"/>
           </a:p>
@@ -14857,7 +14857,7 @@
             <a:pPr algn="ctr"/>
             <a:r>
               <a:rPr lang="en-US"/>
-              <a:t>07/10/2026</a:t>
+              <a:t>12/10/2026</a:t>
             </a:r>
             <a:endParaRPr dirty="0" lang="en-US"/>
           </a:p>
@@ -15090,7 +15090,7 @@
             <a:pPr algn="ctr"/>
             <a:r>
               <a:rPr lang="en-US"/>
-              <a:t>07/10/2026</a:t>
+              <a:t>12/10/2026</a:t>
             </a:r>
             <a:endParaRPr dirty="0" lang="en-US"/>
           </a:p>
@@ -15306,7 +15306,7 @@
             <a:pPr algn="ctr"/>
             <a:r>
               <a:rPr lang="en-US"/>
-              <a:t>07/10/2026</a:t>
+              <a:t>12/10/2026</a:t>
             </a:r>
             <a:endParaRPr dirty="0" lang="en-US"/>
           </a:p>
@@ -15451,7 +15451,7 @@
             <a:pPr algn="ctr"/>
             <a:r>
               <a:rPr lang="en-US"/>
-              <a:t>07/10/2026</a:t>
+              <a:t>12/10/2026</a:t>
             </a:r>
             <a:endParaRPr dirty="0" lang="en-US"/>
           </a:p>
@@ -15617,7 +15617,7 @@
             <a:pPr algn="ctr"/>
             <a:r>
               <a:rPr lang="en-US"/>
-              <a:t>07/10/2026</a:t>
+              <a:t>12/10/2026</a:t>
             </a:r>
             <a:endParaRPr dirty="0" lang="en-US"/>
           </a:p>
@@ -15783,7 +15783,7 @@
             <a:pPr algn="ctr"/>
             <a:r>
               <a:rPr lang="en-US"/>
-              <a:t>07/10/2026</a:t>
+              <a:t>12/10/2026</a:t>
             </a:r>
             <a:endParaRPr dirty="0" lang="en-US"/>
           </a:p>
@@ -16142,7 +16142,7 @@
             <a:pPr algn="ctr"/>
             <a:r>
               <a:rPr lang="en-US"/>
-              <a:t>07/10/2026</a:t>
+              <a:t>12/10/2026</a:t>
             </a:r>
             <a:endParaRPr dirty="0" lang="en-US"/>
           </a:p>
@@ -16346,7 +16346,7 @@
             <a:pPr algn="ctr"/>
             <a:r>
               <a:rPr lang="en-US"/>
-              <a:t>07/10/2026</a:t>
+              <a:t>12/10/2026</a:t>
             </a:r>
             <a:endParaRPr dirty="0" lang="en-US"/>
           </a:p>
@@ -16582,7 +16582,7 @@
             <a:pPr algn="ctr"/>
             <a:r>
               <a:rPr lang="en-US"/>
-              <a:t>07/10/2026</a:t>
+              <a:t>12/10/2026</a:t>
             </a:r>
             <a:endParaRPr dirty="0" lang="en-US"/>
           </a:p>
@@ -16988,7 +16988,7 @@
             <a:pPr algn="ctr"/>
             <a:r>
               <a:rPr lang="en-US"/>
-              <a:t>07/10/2026</a:t>
+              <a:t>12/10/2026</a:t>
             </a:r>
             <a:endParaRPr dirty="0" lang="en-US"/>
           </a:p>
@@ -17169,7 +17169,7 @@
             <a:pPr algn="ctr"/>
             <a:r>
               <a:rPr lang="en-US"/>
-              <a:t>07/10/2026</a:t>
+              <a:t>12/10/2026</a:t>
             </a:r>
             <a:endParaRPr dirty="0" lang="en-US"/>
           </a:p>
@@ -17317,7 +17317,7 @@
             <a:pPr algn="ctr"/>
             <a:r>
               <a:rPr lang="en-US"/>
-              <a:t>07/10/2026</a:t>
+              <a:t>12/10/2026</a:t>
             </a:r>
             <a:endParaRPr dirty="0" lang="en-US"/>
           </a:p>
@@ -17587,7 +17587,7 @@
             <a:pPr algn="ctr"/>
             <a:r>
               <a:rPr lang="en-US"/>
-              <a:t>07/10/2026</a:t>
+              <a:t>12/10/2026</a:t>
             </a:r>
             <a:endParaRPr dirty="0" lang="en-US"/>
           </a:p>
@@ -18129,7 +18129,7 @@
             <a:pPr algn="ctr"/>
             <a:r>
               <a:rPr lang="en-US"/>
-              <a:t>07/10/2026</a:t>
+              <a:t>12/10/2026</a:t>
             </a:r>
             <a:endParaRPr dirty="0" lang="en-US"/>
           </a:p>
@@ -18320,7 +18320,7 @@
             <a:pPr algn="ctr"/>
             <a:r>
               <a:rPr lang="en-US"/>
-              <a:t>07/10/2026</a:t>
+              <a:t>12/10/2026</a:t>
             </a:r>
             <a:endParaRPr dirty="0" lang="en-US"/>
           </a:p>
@@ -18518,7 +18518,7 @@
             <a:pPr algn="ctr"/>
             <a:r>
               <a:rPr lang="en-US"/>
-              <a:t>07/10/2026</a:t>
+              <a:t>12/10/2026</a:t>
             </a:r>
             <a:endParaRPr dirty="0" lang="en-US"/>
           </a:p>
@@ -18734,7 +18734,7 @@
             <a:pPr algn="ctr"/>
             <a:r>
               <a:rPr lang="en-US"/>
-              <a:t>07/10/2026</a:t>
+              <a:t>12/10/2026</a:t>
             </a:r>
             <a:endParaRPr dirty="0" lang="en-US"/>
           </a:p>
@@ -18941,7 +18941,7 @@
             <a:pPr algn="ctr"/>
             <a:r>
               <a:rPr lang="en-US"/>
-              <a:t>07/10/2026</a:t>
+              <a:t>12/10/2026</a:t>
             </a:r>
             <a:endParaRPr dirty="0" lang="en-US"/>
           </a:p>
@@ -19140,7 +19140,7 @@
             <a:pPr algn="ctr"/>
             <a:r>
               <a:rPr lang="en-US"/>
-              <a:t>07/10/2026</a:t>
+              <a:t>12/10/2026</a:t>
             </a:r>
             <a:endParaRPr dirty="0" lang="en-US"/>
           </a:p>
@@ -19356,7 +19356,7 @@
             <a:pPr algn="ctr"/>
             <a:r>
               <a:rPr lang="en-US"/>
-              <a:t>07/10/2026</a:t>
+              <a:t>12/10/2026</a:t>
             </a:r>
             <a:endParaRPr dirty="0" lang="en-US"/>
           </a:p>
@@ -19714,7 +19714,7 @@
             <a:pPr algn="ctr"/>
             <a:r>
               <a:rPr lang="en-US"/>
-              <a:t>07/10/2026</a:t>
+              <a:t>12/10/2026</a:t>
             </a:r>
             <a:endParaRPr dirty="0" lang="en-US"/>
           </a:p>
@@ -19880,7 +19880,7 @@
             <a:pPr algn="ctr"/>
             <a:r>
               <a:rPr lang="en-US"/>
-              <a:t>07/10/2026</a:t>
+              <a:t>12/10/2026</a:t>
             </a:r>
             <a:endParaRPr dirty="0" lang="en-US"/>
           </a:p>
@@ -20174,7 +20174,7 @@
             <a:pPr algn="ctr"/>
             <a:r>
               <a:rPr lang="en-US"/>
-              <a:t>07/10/2026</a:t>
+              <a:t>12/10/2026</a:t>
             </a:r>
             <a:endParaRPr dirty="0" lang="en-US"/>
           </a:p>
@@ -20387,7 +20387,7 @@
             <a:pPr algn="ctr"/>
             <a:r>
               <a:rPr lang="en-US"/>
-              <a:t>07/10/2026</a:t>
+              <a:t>12/10/2026</a:t>
             </a:r>
             <a:endParaRPr dirty="0" lang="en-US"/>
           </a:p>
@@ -20883,7 +20883,7 @@
             <a:pPr algn="ctr"/>
             <a:r>
               <a:rPr lang="en-US"/>
-              <a:t>07/10/2026</a:t>
+              <a:t>12/10/2026</a:t>
             </a:r>
             <a:endParaRPr dirty="0" lang="en-US"/>
           </a:p>
@@ -21022,7 +21022,7 @@
             <a:pPr algn="ctr"/>
             <a:r>
               <a:rPr lang="en-US"/>
-              <a:t>07/10/2026</a:t>
+              <a:t>12/10/2026</a:t>
             </a:r>
             <a:endParaRPr dirty="0" lang="en-US"/>
           </a:p>
@@ -21239,7 +21239,7 @@
             <a:pPr algn="ctr"/>
             <a:r>
               <a:rPr lang="en-US"/>
-              <a:t>07/10/2026</a:t>
+              <a:t>12/10/2026</a:t>
             </a:r>
             <a:endParaRPr dirty="0" lang="en-US"/>
           </a:p>
@@ -21735,7 +21735,7 @@
             <a:pPr algn="ctr"/>
             <a:r>
               <a:rPr lang="en-US"/>
-              <a:t>07/10/2026</a:t>
+              <a:t>12/10/2026</a:t>
             </a:r>
             <a:endParaRPr dirty="0" lang="en-US"/>
           </a:p>
@@ -21937,7 +21937,7 @@
             <a:pPr algn="ctr"/>
             <a:r>
               <a:rPr lang="en-US"/>
-              <a:t>07/10/2026</a:t>
+              <a:t>12/10/2026</a:t>
             </a:r>
             <a:endParaRPr dirty="0" lang="en-US"/>
           </a:p>
@@ -22384,7 +22384,7 @@
             <a:pPr algn="ctr"/>
             <a:r>
               <a:rPr lang="en-US"/>
-              <a:t>07/10/2026</a:t>
+              <a:t>12/10/2026</a:t>
             </a:r>
             <a:endParaRPr dirty="0" lang="en-US"/>
           </a:p>
@@ -22910,7 +22910,7 @@
             <a:pPr algn="ctr"/>
             <a:r>
               <a:rPr lang="en-US"/>
-              <a:t>07/10/2026</a:t>
+              <a:t>12/10/2026</a:t>
             </a:r>
             <a:endParaRPr dirty="0" lang="en-US"/>
           </a:p>
@@ -23128,7 +23128,7 @@
             <a:pPr algn="ctr"/>
             <a:r>
               <a:rPr lang="en-US"/>
-              <a:t>07/10/2026</a:t>
+              <a:t>12/10/2026</a:t>
             </a:r>
             <a:endParaRPr dirty="0" lang="en-US"/>
           </a:p>
@@ -23341,7 +23341,7 @@
             <a:pPr algn="ctr"/>
             <a:r>
               <a:rPr lang="en-US"/>
-              <a:t>07/10/2026</a:t>
+              <a:t>12/10/2026</a:t>
             </a:r>
             <a:endParaRPr dirty="0" lang="en-US"/>
           </a:p>
@@ -23659,7 +23659,7 @@
             <a:pPr algn="ctr"/>
             <a:r>
               <a:rPr lang="en-US"/>
-              <a:t>07/10/2026</a:t>
+              <a:t>12/10/2026</a:t>
             </a:r>
             <a:endParaRPr dirty="0" lang="en-US"/>
           </a:p>
@@ -24115,7 +24115,7 @@
             <a:pPr algn="ctr"/>
             <a:r>
               <a:rPr lang="en-US"/>
-              <a:t>07/10/2026</a:t>
+              <a:t>12/10/2026</a:t>
             </a:r>
             <a:endParaRPr dirty="0" lang="en-US"/>
           </a:p>
@@ -24316,7 +24316,7 @@
             <a:pPr algn="ctr"/>
             <a:r>
               <a:rPr lang="en-US"/>
-              <a:t>07/10/2026</a:t>
+              <a:t>12/10/2026</a:t>
             </a:r>
             <a:endParaRPr dirty="0" lang="en-US"/>
           </a:p>
@@ -24488,7 +24488,7 @@
             <a:pPr algn="ctr"/>
             <a:r>
               <a:rPr lang="en-US"/>
-              <a:t>07/10/2026</a:t>
+              <a:t>12/10/2026</a:t>
             </a:r>
             <a:endParaRPr dirty="0" lang="en-US"/>
           </a:p>
@@ -24689,7 +24689,7 @@
             <a:pPr algn="ctr"/>
             <a:r>
               <a:rPr lang="en-US"/>
-              <a:t>07/10/2026</a:t>
+              <a:t>12/10/2026</a:t>
             </a:r>
             <a:endParaRPr dirty="0" lang="en-US"/>
           </a:p>
@@ -24855,7 +24855,7 @@
             <a:pPr algn="ctr"/>
             <a:r>
               <a:rPr lang="en-US"/>
-              <a:t>07/10/2026</a:t>
+              <a:t>12/10/2026</a:t>
             </a:r>
             <a:endParaRPr dirty="0" lang="en-US"/>
           </a:p>
@@ -25068,7 +25068,7 @@
             <a:pPr algn="ctr"/>
             <a:r>
               <a:rPr lang="en-US"/>
-              <a:t>07/10/2026</a:t>
+              <a:t>12/10/2026</a:t>
             </a:r>
             <a:endParaRPr dirty="0" lang="en-US"/>
           </a:p>
@@ -25449,7 +25449,7 @@
             <a:pPr algn="ctr"/>
             <a:r>
               <a:rPr lang="en-US"/>
-              <a:t>07/10/2026</a:t>
+              <a:t>12/10/2026</a:t>
             </a:r>
             <a:endParaRPr dirty="0" lang="en-US"/>
           </a:p>
@@ -25698,7 +25698,7 @@
             <a:pPr algn="ctr"/>
             <a:r>
               <a:rPr lang="en-US"/>
-              <a:t>07/10/2026</a:t>
+              <a:t>12/10/2026</a:t>
             </a:r>
             <a:endParaRPr dirty="0" lang="en-US"/>
           </a:p>
@@ -25902,7 +25902,7 @@
             <a:pPr algn="ctr"/>
             <a:r>
               <a:rPr lang="en-US"/>
-              <a:t>07/10/2026</a:t>
+              <a:t>12/10/2026</a:t>
             </a:r>
             <a:endParaRPr dirty="0" lang="en-US"/>
           </a:p>
@@ -26041,7 +26041,7 @@
             <a:pPr algn="ctr"/>
             <a:r>
               <a:rPr lang="en-US"/>
-              <a:t>07/10/2026</a:t>
+              <a:t>12/10/2026</a:t>
             </a:r>
             <a:endParaRPr dirty="0" lang="en-US"/>
           </a:p>
@@ -26213,7 +26213,7 @@
             <a:pPr algn="ctr"/>
             <a:r>
               <a:rPr lang="en-US"/>
-              <a:t>07/10/2026</a:t>
+              <a:t>12/10/2026</a:t>
             </a:r>
             <a:endParaRPr dirty="0" lang="en-US"/>
           </a:p>
@@ -26352,7 +26352,7 @@
             <a:pPr algn="ctr"/>
             <a:r>
               <a:rPr lang="en-US"/>
-              <a:t>07/10/2026</a:t>
+              <a:t>12/10/2026</a:t>
             </a:r>
             <a:endParaRPr dirty="0" lang="en-US"/>
           </a:p>

--- a/slides-core-didactic-principles-pptx.pptx
+++ b/slides-core-didactic-principles-pptx.pptx
@@ -10465,7 +10465,7 @@
             <a:pPr algn="ctr"/>
             <a:r>
               <a:rPr lang="en-US"/>
-              <a:t>12/10/2026</a:t>
+              <a:t>19/10/2026</a:t>
             </a:r>
             <a:endParaRPr dirty="0" lang="en-US"/>
           </a:p>
@@ -10692,7 +10692,7 @@
             <a:pPr algn="ctr"/>
             <a:r>
               <a:rPr lang="en-US"/>
-              <a:t>12/10/2026</a:t>
+              <a:t>19/10/2026</a:t>
             </a:r>
             <a:endParaRPr dirty="0" lang="en-US"/>
           </a:p>
@@ -10876,7 +10876,7 @@
             <a:pPr algn="ctr"/>
             <a:r>
               <a:rPr lang="en-US"/>
-              <a:t>12/10/2026</a:t>
+              <a:t>19/10/2026</a:t>
             </a:r>
             <a:endParaRPr dirty="0" lang="en-US"/>
           </a:p>
@@ -11060,7 +11060,7 @@
             <a:pPr algn="ctr"/>
             <a:r>
               <a:rPr lang="en-US"/>
-              <a:t>12/10/2026</a:t>
+              <a:t>19/10/2026</a:t>
             </a:r>
             <a:endParaRPr dirty="0" lang="en-US"/>
           </a:p>
@@ -11226,7 +11226,7 @@
             <a:pPr algn="ctr"/>
             <a:r>
               <a:rPr lang="en-US"/>
-              <a:t>12/10/2026</a:t>
+              <a:t>19/10/2026</a:t>
             </a:r>
             <a:endParaRPr dirty="0" lang="en-US"/>
           </a:p>
@@ -11444,7 +11444,7 @@
             <a:pPr algn="ctr"/>
             <a:r>
               <a:rPr lang="en-US"/>
-              <a:t>12/10/2026</a:t>
+              <a:t>19/10/2026</a:t>
             </a:r>
             <a:endParaRPr dirty="0" lang="en-US"/>
           </a:p>
@@ -11649,7 +11649,7 @@
             <a:pPr algn="ctr"/>
             <a:r>
               <a:rPr lang="en-US"/>
-              <a:t>12/10/2026</a:t>
+              <a:t>19/10/2026</a:t>
             </a:r>
             <a:endParaRPr dirty="0" lang="en-US"/>
           </a:p>
@@ -11854,7 +11854,7 @@
             <a:pPr algn="ctr"/>
             <a:r>
               <a:rPr lang="en-US"/>
-              <a:t>12/10/2026</a:t>
+              <a:t>19/10/2026</a:t>
             </a:r>
             <a:endParaRPr dirty="0" lang="en-US"/>
           </a:p>
@@ -12057,7 +12057,7 @@
             <a:pPr algn="ctr"/>
             <a:r>
               <a:rPr lang="en-US"/>
-              <a:t>12/10/2026</a:t>
+              <a:t>19/10/2026</a:t>
             </a:r>
             <a:endParaRPr dirty="0" lang="en-US"/>
           </a:p>
@@ -12270,7 +12270,7 @@
             <a:pPr algn="ctr"/>
             <a:r>
               <a:rPr lang="en-US"/>
-              <a:t>12/10/2026</a:t>
+              <a:t>19/10/2026</a:t>
             </a:r>
             <a:endParaRPr dirty="0" lang="en-US"/>
           </a:p>
@@ -12763,7 +12763,7 @@
             <a:pPr algn="ctr"/>
             <a:r>
               <a:rPr lang="en-US"/>
-              <a:t>12/10/2026</a:t>
+              <a:t>19/10/2026</a:t>
             </a:r>
             <a:endParaRPr dirty="0" lang="en-US"/>
           </a:p>
@@ -13182,7 +13182,7 @@
             <a:pPr algn="ctr"/>
             <a:r>
               <a:rPr lang="en-US"/>
-              <a:t>12/10/2026</a:t>
+              <a:t>19/10/2026</a:t>
             </a:r>
             <a:endParaRPr dirty="0" lang="en-US"/>
           </a:p>
@@ -13402,7 +13402,7 @@
             <a:pPr algn="ctr"/>
             <a:r>
               <a:rPr lang="en-US"/>
-              <a:t>12/10/2026</a:t>
+              <a:t>19/10/2026</a:t>
             </a:r>
             <a:endParaRPr dirty="0" lang="en-US"/>
           </a:p>
@@ -13625,7 +13625,7 @@
             <a:pPr algn="ctr"/>
             <a:r>
               <a:rPr lang="en-US"/>
-              <a:t>12/10/2026</a:t>
+              <a:t>19/10/2026</a:t>
             </a:r>
             <a:endParaRPr dirty="0" lang="en-US"/>
           </a:p>
@@ -13802,7 +13802,7 @@
             <a:pPr algn="ctr"/>
             <a:r>
               <a:rPr lang="en-US"/>
-              <a:t>12/10/2026</a:t>
+              <a:t>19/10/2026</a:t>
             </a:r>
             <a:endParaRPr dirty="0" lang="en-US"/>
           </a:p>
@@ -14012,7 +14012,7 @@
             <a:pPr algn="ctr"/>
             <a:r>
               <a:rPr lang="en-US"/>
-              <a:t>12/10/2026</a:t>
+              <a:t>19/10/2026</a:t>
             </a:r>
             <a:endParaRPr dirty="0" lang="en-US"/>
           </a:p>
@@ -14229,7 +14229,7 @@
             <a:pPr algn="ctr"/>
             <a:r>
               <a:rPr lang="en-US"/>
-              <a:t>12/10/2026</a:t>
+              <a:t>19/10/2026</a:t>
             </a:r>
             <a:endParaRPr dirty="0" lang="en-US"/>
           </a:p>
@@ -14660,7 +14660,7 @@
             <a:pPr algn="ctr"/>
             <a:r>
               <a:rPr lang="en-US"/>
-              <a:t>12/10/2026</a:t>
+              <a:t>19/10/2026</a:t>
             </a:r>
             <a:endParaRPr dirty="0" lang="en-US"/>
           </a:p>
@@ -14857,7 +14857,7 @@
             <a:pPr algn="ctr"/>
             <a:r>
               <a:rPr lang="en-US"/>
-              <a:t>12/10/2026</a:t>
+              <a:t>19/10/2026</a:t>
             </a:r>
             <a:endParaRPr dirty="0" lang="en-US"/>
           </a:p>
@@ -15090,7 +15090,7 @@
             <a:pPr algn="ctr"/>
             <a:r>
               <a:rPr lang="en-US"/>
-              <a:t>12/10/2026</a:t>
+              <a:t>19/10/2026</a:t>
             </a:r>
             <a:endParaRPr dirty="0" lang="en-US"/>
           </a:p>
@@ -15306,7 +15306,7 @@
             <a:pPr algn="ctr"/>
             <a:r>
               <a:rPr lang="en-US"/>
-              <a:t>12/10/2026</a:t>
+              <a:t>19/10/2026</a:t>
             </a:r>
             <a:endParaRPr dirty="0" lang="en-US"/>
           </a:p>
@@ -15451,7 +15451,7 @@
             <a:pPr algn="ctr"/>
             <a:r>
               <a:rPr lang="en-US"/>
-              <a:t>12/10/2026</a:t>
+              <a:t>19/10/2026</a:t>
             </a:r>
             <a:endParaRPr dirty="0" lang="en-US"/>
           </a:p>
@@ -15617,7 +15617,7 @@
             <a:pPr algn="ctr"/>
             <a:r>
               <a:rPr lang="en-US"/>
-              <a:t>12/10/2026</a:t>
+              <a:t>19/10/2026</a:t>
             </a:r>
             <a:endParaRPr dirty="0" lang="en-US"/>
           </a:p>
@@ -15783,7 +15783,7 @@
             <a:pPr algn="ctr"/>
             <a:r>
               <a:rPr lang="en-US"/>
-              <a:t>12/10/2026</a:t>
+              <a:t>19/10/2026</a:t>
             </a:r>
             <a:endParaRPr dirty="0" lang="en-US"/>
           </a:p>
@@ -16142,7 +16142,7 @@
             <a:pPr algn="ctr"/>
             <a:r>
               <a:rPr lang="en-US"/>
-              <a:t>12/10/2026</a:t>
+              <a:t>19/10/2026</a:t>
             </a:r>
             <a:endParaRPr dirty="0" lang="en-US"/>
           </a:p>
@@ -16346,7 +16346,7 @@
             <a:pPr algn="ctr"/>
             <a:r>
               <a:rPr lang="en-US"/>
-              <a:t>12/10/2026</a:t>
+              <a:t>19/10/2026</a:t>
             </a:r>
             <a:endParaRPr dirty="0" lang="en-US"/>
           </a:p>
@@ -16582,7 +16582,7 @@
             <a:pPr algn="ctr"/>
             <a:r>
               <a:rPr lang="en-US"/>
-              <a:t>12/10/2026</a:t>
+              <a:t>19/10/2026</a:t>
             </a:r>
             <a:endParaRPr dirty="0" lang="en-US"/>
           </a:p>
@@ -16988,7 +16988,7 @@
             <a:pPr algn="ctr"/>
             <a:r>
               <a:rPr lang="en-US"/>
-              <a:t>12/10/2026</a:t>
+              <a:t>19/10/2026</a:t>
             </a:r>
             <a:endParaRPr dirty="0" lang="en-US"/>
           </a:p>
@@ -17169,7 +17169,7 @@
             <a:pPr algn="ctr"/>
             <a:r>
               <a:rPr lang="en-US"/>
-              <a:t>12/10/2026</a:t>
+              <a:t>19/10/2026</a:t>
             </a:r>
             <a:endParaRPr dirty="0" lang="en-US"/>
           </a:p>
@@ -17317,7 +17317,7 @@
             <a:pPr algn="ctr"/>
             <a:r>
               <a:rPr lang="en-US"/>
-              <a:t>12/10/2026</a:t>
+              <a:t>19/10/2026</a:t>
             </a:r>
             <a:endParaRPr dirty="0" lang="en-US"/>
           </a:p>
@@ -17587,7 +17587,7 @@
             <a:pPr algn="ctr"/>
             <a:r>
               <a:rPr lang="en-US"/>
-              <a:t>12/10/2026</a:t>
+              <a:t>19/10/2026</a:t>
             </a:r>
             <a:endParaRPr dirty="0" lang="en-US"/>
           </a:p>
@@ -18129,7 +18129,7 @@
             <a:pPr algn="ctr"/>
             <a:r>
               <a:rPr lang="en-US"/>
-              <a:t>12/10/2026</a:t>
+              <a:t>19/10/2026</a:t>
             </a:r>
             <a:endParaRPr dirty="0" lang="en-US"/>
           </a:p>
@@ -18320,7 +18320,7 @@
             <a:pPr algn="ctr"/>
             <a:r>
               <a:rPr lang="en-US"/>
-              <a:t>12/10/2026</a:t>
+              <a:t>19/10/2026</a:t>
             </a:r>
             <a:endParaRPr dirty="0" lang="en-US"/>
           </a:p>
@@ -18518,7 +18518,7 @@
             <a:pPr algn="ctr"/>
             <a:r>
               <a:rPr lang="en-US"/>
-              <a:t>12/10/2026</a:t>
+              <a:t>19/10/2026</a:t>
             </a:r>
             <a:endParaRPr dirty="0" lang="en-US"/>
           </a:p>
@@ -18734,7 +18734,7 @@
             <a:pPr algn="ctr"/>
             <a:r>
               <a:rPr lang="en-US"/>
-              <a:t>12/10/2026</a:t>
+              <a:t>19/10/2026</a:t>
             </a:r>
             <a:endParaRPr dirty="0" lang="en-US"/>
           </a:p>
@@ -18941,7 +18941,7 @@
             <a:pPr algn="ctr"/>
             <a:r>
               <a:rPr lang="en-US"/>
-              <a:t>12/10/2026</a:t>
+              <a:t>19/10/2026</a:t>
             </a:r>
             <a:endParaRPr dirty="0" lang="en-US"/>
           </a:p>
@@ -19140,7 +19140,7 @@
             <a:pPr algn="ctr"/>
             <a:r>
               <a:rPr lang="en-US"/>
-              <a:t>12/10/2026</a:t>
+              <a:t>19/10/2026</a:t>
             </a:r>
             <a:endParaRPr dirty="0" lang="en-US"/>
           </a:p>
@@ -19356,7 +19356,7 @@
             <a:pPr algn="ctr"/>
             <a:r>
               <a:rPr lang="en-US"/>
-              <a:t>12/10/2026</a:t>
+              <a:t>19/10/2026</a:t>
             </a:r>
             <a:endParaRPr dirty="0" lang="en-US"/>
           </a:p>
@@ -19714,7 +19714,7 @@
             <a:pPr algn="ctr"/>
             <a:r>
               <a:rPr lang="en-US"/>
-              <a:t>12/10/2026</a:t>
+              <a:t>19/10/2026</a:t>
             </a:r>
             <a:endParaRPr dirty="0" lang="en-US"/>
           </a:p>
@@ -19880,7 +19880,7 @@
             <a:pPr algn="ctr"/>
             <a:r>
               <a:rPr lang="en-US"/>
-              <a:t>12/10/2026</a:t>
+              <a:t>19/10/2026</a:t>
             </a:r>
             <a:endParaRPr dirty="0" lang="en-US"/>
           </a:p>
@@ -20174,7 +20174,7 @@
             <a:pPr algn="ctr"/>
             <a:r>
               <a:rPr lang="en-US"/>
-              <a:t>12/10/2026</a:t>
+              <a:t>19/10/2026</a:t>
             </a:r>
             <a:endParaRPr dirty="0" lang="en-US"/>
           </a:p>
@@ -20387,7 +20387,7 @@
             <a:pPr algn="ctr"/>
             <a:r>
               <a:rPr lang="en-US"/>
-              <a:t>12/10/2026</a:t>
+              <a:t>19/10/2026</a:t>
             </a:r>
             <a:endParaRPr dirty="0" lang="en-US"/>
           </a:p>
@@ -20883,7 +20883,7 @@
             <a:pPr algn="ctr"/>
             <a:r>
               <a:rPr lang="en-US"/>
-              <a:t>12/10/2026</a:t>
+              <a:t>19/10/2026</a:t>
             </a:r>
             <a:endParaRPr dirty="0" lang="en-US"/>
           </a:p>
@@ -21022,7 +21022,7 @@
             <a:pPr algn="ctr"/>
             <a:r>
               <a:rPr lang="en-US"/>
-              <a:t>12/10/2026</a:t>
+              <a:t>19/10/2026</a:t>
             </a:r>
             <a:endParaRPr dirty="0" lang="en-US"/>
           </a:p>
@@ -21239,7 +21239,7 @@
             <a:pPr algn="ctr"/>
             <a:r>
               <a:rPr lang="en-US"/>
-              <a:t>12/10/2026</a:t>
+              <a:t>19/10/2026</a:t>
             </a:r>
             <a:endParaRPr dirty="0" lang="en-US"/>
           </a:p>
@@ -21735,7 +21735,7 @@
             <a:pPr algn="ctr"/>
             <a:r>
               <a:rPr lang="en-US"/>
-              <a:t>12/10/2026</a:t>
+              <a:t>19/10/2026</a:t>
             </a:r>
             <a:endParaRPr dirty="0" lang="en-US"/>
           </a:p>
@@ -21937,7 +21937,7 @@
             <a:pPr algn="ctr"/>
             <a:r>
               <a:rPr lang="en-US"/>
-              <a:t>12/10/2026</a:t>
+              <a:t>19/10/2026</a:t>
             </a:r>
             <a:endParaRPr dirty="0" lang="en-US"/>
           </a:p>
@@ -22384,7 +22384,7 @@
             <a:pPr algn="ctr"/>
             <a:r>
               <a:rPr lang="en-US"/>
-              <a:t>12/10/2026</a:t>
+              <a:t>19/10/2026</a:t>
             </a:r>
             <a:endParaRPr dirty="0" lang="en-US"/>
           </a:p>
@@ -22910,7 +22910,7 @@
             <a:pPr algn="ctr"/>
             <a:r>
               <a:rPr lang="en-US"/>
-              <a:t>12/10/2026</a:t>
+              <a:t>19/10/2026</a:t>
             </a:r>
             <a:endParaRPr dirty="0" lang="en-US"/>
           </a:p>
@@ -23128,7 +23128,7 @@
             <a:pPr algn="ctr"/>
             <a:r>
               <a:rPr lang="en-US"/>
-              <a:t>12/10/2026</a:t>
+              <a:t>19/10/2026</a:t>
             </a:r>
             <a:endParaRPr dirty="0" lang="en-US"/>
           </a:p>
@@ -23341,7 +23341,7 @@
             <a:pPr algn="ctr"/>
             <a:r>
               <a:rPr lang="en-US"/>
-              <a:t>12/10/2026</a:t>
+              <a:t>19/10/2026</a:t>
             </a:r>
             <a:endParaRPr dirty="0" lang="en-US"/>
           </a:p>
@@ -23659,7 +23659,7 @@
             <a:pPr algn="ctr"/>
             <a:r>
               <a:rPr lang="en-US"/>
-              <a:t>12/10/2026</a:t>
+              <a:t>19/10/2026</a:t>
             </a:r>
             <a:endParaRPr dirty="0" lang="en-US"/>
           </a:p>
@@ -24115,7 +24115,7 @@
             <a:pPr algn="ctr"/>
             <a:r>
               <a:rPr lang="en-US"/>
-              <a:t>12/10/2026</a:t>
+              <a:t>19/10/2026</a:t>
             </a:r>
             <a:endParaRPr dirty="0" lang="en-US"/>
           </a:p>
@@ -24316,7 +24316,7 @@
             <a:pPr algn="ctr"/>
             <a:r>
               <a:rPr lang="en-US"/>
-              <a:t>12/10/2026</a:t>
+              <a:t>19/10/2026</a:t>
             </a:r>
             <a:endParaRPr dirty="0" lang="en-US"/>
           </a:p>
@@ -24488,7 +24488,7 @@
             <a:pPr algn="ctr"/>
             <a:r>
               <a:rPr lang="en-US"/>
-              <a:t>12/10/2026</a:t>
+              <a:t>19/10/2026</a:t>
             </a:r>
             <a:endParaRPr dirty="0" lang="en-US"/>
           </a:p>
@@ -24689,7 +24689,7 @@
             <a:pPr algn="ctr"/>
             <a:r>
               <a:rPr lang="en-US"/>
-              <a:t>12/10/2026</a:t>
+              <a:t>19/10/2026</a:t>
             </a:r>
             <a:endParaRPr dirty="0" lang="en-US"/>
           </a:p>
@@ -24855,7 +24855,7 @@
             <a:pPr algn="ctr"/>
             <a:r>
               <a:rPr lang="en-US"/>
-              <a:t>12/10/2026</a:t>
+              <a:t>19/10/2026</a:t>
             </a:r>
             <a:endParaRPr dirty="0" lang="en-US"/>
           </a:p>
@@ -25068,7 +25068,7 @@
             <a:pPr algn="ctr"/>
             <a:r>
               <a:rPr lang="en-US"/>
-              <a:t>12/10/2026</a:t>
+              <a:t>19/10/2026</a:t>
             </a:r>
             <a:endParaRPr dirty="0" lang="en-US"/>
           </a:p>
@@ -25449,7 +25449,7 @@
             <a:pPr algn="ctr"/>
             <a:r>
               <a:rPr lang="en-US"/>
-              <a:t>12/10/2026</a:t>
+              <a:t>19/10/2026</a:t>
             </a:r>
             <a:endParaRPr dirty="0" lang="en-US"/>
           </a:p>
@@ -25698,7 +25698,7 @@
             <a:pPr algn="ctr"/>
             <a:r>
               <a:rPr lang="en-US"/>
-              <a:t>12/10/2026</a:t>
+              <a:t>19/10/2026</a:t>
             </a:r>
             <a:endParaRPr dirty="0" lang="en-US"/>
           </a:p>
@@ -25902,7 +25902,7 @@
             <a:pPr algn="ctr"/>
             <a:r>
               <a:rPr lang="en-US"/>
-              <a:t>12/10/2026</a:t>
+              <a:t>19/10/2026</a:t>
             </a:r>
             <a:endParaRPr dirty="0" lang="en-US"/>
           </a:p>
@@ -26041,7 +26041,7 @@
             <a:pPr algn="ctr"/>
             <a:r>
               <a:rPr lang="en-US"/>
-              <a:t>12/10/2026</a:t>
+              <a:t>19/10/2026</a:t>
             </a:r>
             <a:endParaRPr dirty="0" lang="en-US"/>
           </a:p>
@@ -26213,7 +26213,7 @@
             <a:pPr algn="ctr"/>
             <a:r>
               <a:rPr lang="en-US"/>
-              <a:t>12/10/2026</a:t>
+              <a:t>19/10/2026</a:t>
             </a:r>
             <a:endParaRPr dirty="0" lang="en-US"/>
           </a:p>
@@ -26352,7 +26352,7 @@
             <a:pPr algn="ctr"/>
             <a:r>
               <a:rPr lang="en-US"/>
-              <a:t>12/10/2026</a:t>
+              <a:t>19/10/2026</a:t>
             </a:r>
             <a:endParaRPr dirty="0" lang="en-US"/>
           </a:p>

--- a/slides-core-didactic-principles-pptx.pptx
+++ b/slides-core-didactic-principles-pptx.pptx
@@ -10465,7 +10465,7 @@
             <a:pPr algn="ctr"/>
             <a:r>
               <a:rPr lang="en-US"/>
-              <a:t>19/10/2026</a:t>
+              <a:t>26/10/2026</a:t>
             </a:r>
             <a:endParaRPr dirty="0" lang="en-US"/>
           </a:p>
@@ -10692,7 +10692,7 @@
             <a:pPr algn="ctr"/>
             <a:r>
               <a:rPr lang="en-US"/>
-              <a:t>19/10/2026</a:t>
+              <a:t>26/10/2026</a:t>
             </a:r>
             <a:endParaRPr dirty="0" lang="en-US"/>
           </a:p>
@@ -10876,7 +10876,7 @@
             <a:pPr algn="ctr"/>
             <a:r>
               <a:rPr lang="en-US"/>
-              <a:t>19/10/2026</a:t>
+              <a:t>26/10/2026</a:t>
             </a:r>
             <a:endParaRPr dirty="0" lang="en-US"/>
           </a:p>
@@ -11060,7 +11060,7 @@
             <a:pPr algn="ctr"/>
             <a:r>
               <a:rPr lang="en-US"/>
-              <a:t>19/10/2026</a:t>
+              <a:t>26/10/2026</a:t>
             </a:r>
             <a:endParaRPr dirty="0" lang="en-US"/>
           </a:p>
@@ -11226,7 +11226,7 @@
             <a:pPr algn="ctr"/>
             <a:r>
               <a:rPr lang="en-US"/>
-              <a:t>19/10/2026</a:t>
+              <a:t>26/10/2026</a:t>
             </a:r>
             <a:endParaRPr dirty="0" lang="en-US"/>
           </a:p>
@@ -11444,7 +11444,7 @@
             <a:pPr algn="ctr"/>
             <a:r>
               <a:rPr lang="en-US"/>
-              <a:t>19/10/2026</a:t>
+              <a:t>26/10/2026</a:t>
             </a:r>
             <a:endParaRPr dirty="0" lang="en-US"/>
           </a:p>
@@ -11649,7 +11649,7 @@
             <a:pPr algn="ctr"/>
             <a:r>
               <a:rPr lang="en-US"/>
-              <a:t>19/10/2026</a:t>
+              <a:t>26/10/2026</a:t>
             </a:r>
             <a:endParaRPr dirty="0" lang="en-US"/>
           </a:p>
@@ -11854,7 +11854,7 @@
             <a:pPr algn="ctr"/>
             <a:r>
               <a:rPr lang="en-US"/>
-              <a:t>19/10/2026</a:t>
+              <a:t>26/10/2026</a:t>
             </a:r>
             <a:endParaRPr dirty="0" lang="en-US"/>
           </a:p>
@@ -12057,7 +12057,7 @@
             <a:pPr algn="ctr"/>
             <a:r>
               <a:rPr lang="en-US"/>
-              <a:t>19/10/2026</a:t>
+              <a:t>26/10/2026</a:t>
             </a:r>
             <a:endParaRPr dirty="0" lang="en-US"/>
           </a:p>
@@ -12270,7 +12270,7 @@
             <a:pPr algn="ctr"/>
             <a:r>
               <a:rPr lang="en-US"/>
-              <a:t>19/10/2026</a:t>
+              <a:t>26/10/2026</a:t>
             </a:r>
             <a:endParaRPr dirty="0" lang="en-US"/>
           </a:p>
@@ -12763,7 +12763,7 @@
             <a:pPr algn="ctr"/>
             <a:r>
               <a:rPr lang="en-US"/>
-              <a:t>19/10/2026</a:t>
+              <a:t>26/10/2026</a:t>
             </a:r>
             <a:endParaRPr dirty="0" lang="en-US"/>
           </a:p>
@@ -13182,7 +13182,7 @@
             <a:pPr algn="ctr"/>
             <a:r>
               <a:rPr lang="en-US"/>
-              <a:t>19/10/2026</a:t>
+              <a:t>26/10/2026</a:t>
             </a:r>
             <a:endParaRPr dirty="0" lang="en-US"/>
           </a:p>
@@ -13402,7 +13402,7 @@
             <a:pPr algn="ctr"/>
             <a:r>
               <a:rPr lang="en-US"/>
-              <a:t>19/10/2026</a:t>
+              <a:t>26/10/2026</a:t>
             </a:r>
             <a:endParaRPr dirty="0" lang="en-US"/>
           </a:p>
@@ -13625,7 +13625,7 @@
             <a:pPr algn="ctr"/>
             <a:r>
               <a:rPr lang="en-US"/>
-              <a:t>19/10/2026</a:t>
+              <a:t>26/10/2026</a:t>
             </a:r>
             <a:endParaRPr dirty="0" lang="en-US"/>
           </a:p>
@@ -13802,7 +13802,7 @@
             <a:pPr algn="ctr"/>
             <a:r>
               <a:rPr lang="en-US"/>
-              <a:t>19/10/2026</a:t>
+              <a:t>26/10/2026</a:t>
             </a:r>
             <a:endParaRPr dirty="0" lang="en-US"/>
           </a:p>
@@ -14012,7 +14012,7 @@
             <a:pPr algn="ctr"/>
             <a:r>
               <a:rPr lang="en-US"/>
-              <a:t>19/10/2026</a:t>
+              <a:t>26/10/2026</a:t>
             </a:r>
             <a:endParaRPr dirty="0" lang="en-US"/>
           </a:p>
@@ -14229,7 +14229,7 @@
             <a:pPr algn="ctr"/>
             <a:r>
               <a:rPr lang="en-US"/>
-              <a:t>19/10/2026</a:t>
+              <a:t>26/10/2026</a:t>
             </a:r>
             <a:endParaRPr dirty="0" lang="en-US"/>
           </a:p>
@@ -14660,7 +14660,7 @@
             <a:pPr algn="ctr"/>
             <a:r>
               <a:rPr lang="en-US"/>
-              <a:t>19/10/2026</a:t>
+              <a:t>26/10/2026</a:t>
             </a:r>
             <a:endParaRPr dirty="0" lang="en-US"/>
           </a:p>
@@ -14857,7 +14857,7 @@
             <a:pPr algn="ctr"/>
             <a:r>
               <a:rPr lang="en-US"/>
-              <a:t>19/10/2026</a:t>
+              <a:t>26/10/2026</a:t>
             </a:r>
             <a:endParaRPr dirty="0" lang="en-US"/>
           </a:p>
@@ -15090,7 +15090,7 @@
             <a:pPr algn="ctr"/>
             <a:r>
               <a:rPr lang="en-US"/>
-              <a:t>19/10/2026</a:t>
+              <a:t>26/10/2026</a:t>
             </a:r>
             <a:endParaRPr dirty="0" lang="en-US"/>
           </a:p>
@@ -15306,7 +15306,7 @@
             <a:pPr algn="ctr"/>
             <a:r>
               <a:rPr lang="en-US"/>
-              <a:t>19/10/2026</a:t>
+              <a:t>26/10/2026</a:t>
             </a:r>
             <a:endParaRPr dirty="0" lang="en-US"/>
           </a:p>
@@ -15451,7 +15451,7 @@
             <a:pPr algn="ctr"/>
             <a:r>
               <a:rPr lang="en-US"/>
-              <a:t>19/10/2026</a:t>
+              <a:t>26/10/2026</a:t>
             </a:r>
             <a:endParaRPr dirty="0" lang="en-US"/>
           </a:p>
@@ -15617,7 +15617,7 @@
             <a:pPr algn="ctr"/>
             <a:r>
               <a:rPr lang="en-US"/>
-              <a:t>19/10/2026</a:t>
+              <a:t>26/10/2026</a:t>
             </a:r>
             <a:endParaRPr dirty="0" lang="en-US"/>
           </a:p>
@@ -15783,7 +15783,7 @@
             <a:pPr algn="ctr"/>
             <a:r>
               <a:rPr lang="en-US"/>
-              <a:t>19/10/2026</a:t>
+              <a:t>26/10/2026</a:t>
             </a:r>
             <a:endParaRPr dirty="0" lang="en-US"/>
           </a:p>
@@ -16142,7 +16142,7 @@
             <a:pPr algn="ctr"/>
             <a:r>
               <a:rPr lang="en-US"/>
-              <a:t>19/10/2026</a:t>
+              <a:t>26/10/2026</a:t>
             </a:r>
             <a:endParaRPr dirty="0" lang="en-US"/>
           </a:p>
@@ -16346,7 +16346,7 @@
             <a:pPr algn="ctr"/>
             <a:r>
               <a:rPr lang="en-US"/>
-              <a:t>19/10/2026</a:t>
+              <a:t>26/10/2026</a:t>
             </a:r>
             <a:endParaRPr dirty="0" lang="en-US"/>
           </a:p>
@@ -16582,7 +16582,7 @@
             <a:pPr algn="ctr"/>
             <a:r>
               <a:rPr lang="en-US"/>
-              <a:t>19/10/2026</a:t>
+              <a:t>26/10/2026</a:t>
             </a:r>
             <a:endParaRPr dirty="0" lang="en-US"/>
           </a:p>
@@ -16988,7 +16988,7 @@
             <a:pPr algn="ctr"/>
             <a:r>
               <a:rPr lang="en-US"/>
-              <a:t>19/10/2026</a:t>
+              <a:t>26/10/2026</a:t>
             </a:r>
             <a:endParaRPr dirty="0" lang="en-US"/>
           </a:p>
@@ -17169,7 +17169,7 @@
             <a:pPr algn="ctr"/>
             <a:r>
               <a:rPr lang="en-US"/>
-              <a:t>19/10/2026</a:t>
+              <a:t>26/10/2026</a:t>
             </a:r>
             <a:endParaRPr dirty="0" lang="en-US"/>
           </a:p>
@@ -17317,7 +17317,7 @@
             <a:pPr algn="ctr"/>
             <a:r>
               <a:rPr lang="en-US"/>
-              <a:t>19/10/2026</a:t>
+              <a:t>26/10/2026</a:t>
             </a:r>
             <a:endParaRPr dirty="0" lang="en-US"/>
           </a:p>
@@ -17587,7 +17587,7 @@
             <a:pPr algn="ctr"/>
             <a:r>
               <a:rPr lang="en-US"/>
-              <a:t>19/10/2026</a:t>
+              <a:t>26/10/2026</a:t>
             </a:r>
             <a:endParaRPr dirty="0" lang="en-US"/>
           </a:p>
@@ -18129,7 +18129,7 @@
             <a:pPr algn="ctr"/>
             <a:r>
               <a:rPr lang="en-US"/>
-              <a:t>19/10/2026</a:t>
+              <a:t>26/10/2026</a:t>
             </a:r>
             <a:endParaRPr dirty="0" lang="en-US"/>
           </a:p>
@@ -18320,7 +18320,7 @@
             <a:pPr algn="ctr"/>
             <a:r>
               <a:rPr lang="en-US"/>
-              <a:t>19/10/2026</a:t>
+              <a:t>26/10/2026</a:t>
             </a:r>
             <a:endParaRPr dirty="0" lang="en-US"/>
           </a:p>
@@ -18518,7 +18518,7 @@
             <a:pPr algn="ctr"/>
             <a:r>
               <a:rPr lang="en-US"/>
-              <a:t>19/10/2026</a:t>
+              <a:t>26/10/2026</a:t>
             </a:r>
             <a:endParaRPr dirty="0" lang="en-US"/>
           </a:p>
@@ -18734,7 +18734,7 @@
             <a:pPr algn="ctr"/>
             <a:r>
               <a:rPr lang="en-US"/>
-              <a:t>19/10/2026</a:t>
+              <a:t>26/10/2026</a:t>
             </a:r>
             <a:endParaRPr dirty="0" lang="en-US"/>
           </a:p>
@@ -18941,7 +18941,7 @@
             <a:pPr algn="ctr"/>
             <a:r>
               <a:rPr lang="en-US"/>
-              <a:t>19/10/2026</a:t>
+              <a:t>26/10/2026</a:t>
             </a:r>
             <a:endParaRPr dirty="0" lang="en-US"/>
           </a:p>
@@ -19140,7 +19140,7 @@
             <a:pPr algn="ctr"/>
             <a:r>
               <a:rPr lang="en-US"/>
-              <a:t>19/10/2026</a:t>
+              <a:t>26/10/2026</a:t>
             </a:r>
             <a:endParaRPr dirty="0" lang="en-US"/>
           </a:p>
@@ -19356,7 +19356,7 @@
             <a:pPr algn="ctr"/>
             <a:r>
               <a:rPr lang="en-US"/>
-              <a:t>19/10/2026</a:t>
+              <a:t>26/10/2026</a:t>
             </a:r>
             <a:endParaRPr dirty="0" lang="en-US"/>
           </a:p>
@@ -19714,7 +19714,7 @@
             <a:pPr algn="ctr"/>
             <a:r>
               <a:rPr lang="en-US"/>
-              <a:t>19/10/2026</a:t>
+              <a:t>26/10/2026</a:t>
             </a:r>
             <a:endParaRPr dirty="0" lang="en-US"/>
           </a:p>
@@ -19880,7 +19880,7 @@
             <a:pPr algn="ctr"/>
             <a:r>
               <a:rPr lang="en-US"/>
-              <a:t>19/10/2026</a:t>
+              <a:t>26/10/2026</a:t>
             </a:r>
             <a:endParaRPr dirty="0" lang="en-US"/>
           </a:p>
@@ -20174,7 +20174,7 @@
             <a:pPr algn="ctr"/>
             <a:r>
               <a:rPr lang="en-US"/>
-              <a:t>19/10/2026</a:t>
+              <a:t>26/10/2026</a:t>
             </a:r>
             <a:endParaRPr dirty="0" lang="en-US"/>
           </a:p>
@@ -20387,7 +20387,7 @@
             <a:pPr algn="ctr"/>
             <a:r>
               <a:rPr lang="en-US"/>
-              <a:t>19/10/2026</a:t>
+              <a:t>26/10/2026</a:t>
             </a:r>
             <a:endParaRPr dirty="0" lang="en-US"/>
           </a:p>
@@ -20883,7 +20883,7 @@
             <a:pPr algn="ctr"/>
             <a:r>
               <a:rPr lang="en-US"/>
-              <a:t>19/10/2026</a:t>
+              <a:t>26/10/2026</a:t>
             </a:r>
             <a:endParaRPr dirty="0" lang="en-US"/>
           </a:p>
@@ -21022,7 +21022,7 @@
             <a:pPr algn="ctr"/>
             <a:r>
               <a:rPr lang="en-US"/>
-              <a:t>19/10/2026</a:t>
+              <a:t>26/10/2026</a:t>
             </a:r>
             <a:endParaRPr dirty="0" lang="en-US"/>
           </a:p>
@@ -21239,7 +21239,7 @@
             <a:pPr algn="ctr"/>
             <a:r>
               <a:rPr lang="en-US"/>
-              <a:t>19/10/2026</a:t>
+              <a:t>26/10/2026</a:t>
             </a:r>
             <a:endParaRPr dirty="0" lang="en-US"/>
           </a:p>
@@ -21735,7 +21735,7 @@
             <a:pPr algn="ctr"/>
             <a:r>
               <a:rPr lang="en-US"/>
-              <a:t>19/10/2026</a:t>
+              <a:t>26/10/2026</a:t>
             </a:r>
             <a:endParaRPr dirty="0" lang="en-US"/>
           </a:p>
@@ -21937,7 +21937,7 @@
             <a:pPr algn="ctr"/>
             <a:r>
               <a:rPr lang="en-US"/>
-              <a:t>19/10/2026</a:t>
+              <a:t>26/10/2026</a:t>
             </a:r>
             <a:endParaRPr dirty="0" lang="en-US"/>
           </a:p>
@@ -22384,7 +22384,7 @@
             <a:pPr algn="ctr"/>
             <a:r>
               <a:rPr lang="en-US"/>
-              <a:t>19/10/2026</a:t>
+              <a:t>26/10/2026</a:t>
             </a:r>
             <a:endParaRPr dirty="0" lang="en-US"/>
           </a:p>
@@ -22910,7 +22910,7 @@
             <a:pPr algn="ctr"/>
             <a:r>
               <a:rPr lang="en-US"/>
-              <a:t>19/10/2026</a:t>
+              <a:t>26/10/2026</a:t>
             </a:r>
             <a:endParaRPr dirty="0" lang="en-US"/>
           </a:p>
@@ -23128,7 +23128,7 @@
             <a:pPr algn="ctr"/>
             <a:r>
               <a:rPr lang="en-US"/>
-              <a:t>19/10/2026</a:t>
+              <a:t>26/10/2026</a:t>
             </a:r>
             <a:endParaRPr dirty="0" lang="en-US"/>
           </a:p>
@@ -23341,7 +23341,7 @@
             <a:pPr algn="ctr"/>
             <a:r>
               <a:rPr lang="en-US"/>
-              <a:t>19/10/2026</a:t>
+              <a:t>26/10/2026</a:t>
             </a:r>
             <a:endParaRPr dirty="0" lang="en-US"/>
           </a:p>
@@ -23659,7 +23659,7 @@
             <a:pPr algn="ctr"/>
             <a:r>
               <a:rPr lang="en-US"/>
-              <a:t>19/10/2026</a:t>
+              <a:t>26/10/2026</a:t>
             </a:r>
             <a:endParaRPr dirty="0" lang="en-US"/>
           </a:p>
@@ -24115,7 +24115,7 @@
             <a:pPr algn="ctr"/>
             <a:r>
               <a:rPr lang="en-US"/>
-              <a:t>19/10/2026</a:t>
+              <a:t>26/10/2026</a:t>
             </a:r>
             <a:endParaRPr dirty="0" lang="en-US"/>
           </a:p>
@@ -24316,7 +24316,7 @@
             <a:pPr algn="ctr"/>
             <a:r>
               <a:rPr lang="en-US"/>
-              <a:t>19/10/2026</a:t>
+              <a:t>26/10/2026</a:t>
             </a:r>
             <a:endParaRPr dirty="0" lang="en-US"/>
           </a:p>
@@ -24488,7 +24488,7 @@
             <a:pPr algn="ctr"/>
             <a:r>
               <a:rPr lang="en-US"/>
-              <a:t>19/10/2026</a:t>
+              <a:t>26/10/2026</a:t>
             </a:r>
             <a:endParaRPr dirty="0" lang="en-US"/>
           </a:p>
@@ -24689,7 +24689,7 @@
             <a:pPr algn="ctr"/>
             <a:r>
               <a:rPr lang="en-US"/>
-              <a:t>19/10/2026</a:t>
+              <a:t>26/10/2026</a:t>
             </a:r>
             <a:endParaRPr dirty="0" lang="en-US"/>
           </a:p>
@@ -24855,7 +24855,7 @@
             <a:pPr algn="ctr"/>
             <a:r>
               <a:rPr lang="en-US"/>
-              <a:t>19/10/2026</a:t>
+              <a:t>26/10/2026</a:t>
             </a:r>
             <a:endParaRPr dirty="0" lang="en-US"/>
           </a:p>
@@ -25068,7 +25068,7 @@
             <a:pPr algn="ctr"/>
             <a:r>
               <a:rPr lang="en-US"/>
-              <a:t>19/10/2026</a:t>
+              <a:t>26/10/2026</a:t>
             </a:r>
             <a:endParaRPr dirty="0" lang="en-US"/>
           </a:p>
@@ -25449,7 +25449,7 @@
             <a:pPr algn="ctr"/>
             <a:r>
               <a:rPr lang="en-US"/>
-              <a:t>19/10/2026</a:t>
+              <a:t>26/10/2026</a:t>
             </a:r>
             <a:endParaRPr dirty="0" lang="en-US"/>
           </a:p>
@@ -25698,7 +25698,7 @@
             <a:pPr algn="ctr"/>
             <a:r>
               <a:rPr lang="en-US"/>
-              <a:t>19/10/2026</a:t>
+              <a:t>26/10/2026</a:t>
             </a:r>
             <a:endParaRPr dirty="0" lang="en-US"/>
           </a:p>
@@ -25902,7 +25902,7 @@
             <a:pPr algn="ctr"/>
             <a:r>
               <a:rPr lang="en-US"/>
-              <a:t>19/10/2026</a:t>
+              <a:t>26/10/2026</a:t>
             </a:r>
             <a:endParaRPr dirty="0" lang="en-US"/>
           </a:p>
@@ -26041,7 +26041,7 @@
             <a:pPr algn="ctr"/>
             <a:r>
               <a:rPr lang="en-US"/>
-              <a:t>19/10/2026</a:t>
+              <a:t>26/10/2026</a:t>
             </a:r>
             <a:endParaRPr dirty="0" lang="en-US"/>
           </a:p>
@@ -26213,7 +26213,7 @@
             <a:pPr algn="ctr"/>
             <a:r>
               <a:rPr lang="en-US"/>
-              <a:t>19/10/2026</a:t>
+              <a:t>26/10/2026</a:t>
             </a:r>
             <a:endParaRPr dirty="0" lang="en-US"/>
           </a:p>
@@ -26352,7 +26352,7 @@
             <a:pPr algn="ctr"/>
             <a:r>
               <a:rPr lang="en-US"/>
-              <a:t>19/10/2026</a:t>
+              <a:t>26/10/2026</a:t>
             </a:r>
             <a:endParaRPr dirty="0" lang="en-US"/>
           </a:p>
